--- a/atolye_icerik/sunumlar/en/05_track_b_2d_3d.pptx
+++ b/atolye_icerik/sunumlar/en/05_track_b_2d_3d.pptx
@@ -1887,7 +1887,7 @@
                 <a:ea typeface="Arial" pitchFamily="34" charset="-122"/>
                 <a:cs typeface="Arial" pitchFamily="34" charset="-120"/>
               </a:rPr>
-              <a:t>TRACK B · 13:30 – 16:45 · ART + TECH ART</a:t>
+              <a:t>TRACK B · 15:15 – 16:45 · ART + TECH ART</a:t>
             </a:r>
             <a:endParaRPr lang="en-US" sz="1300" dirty="0"/>
           </a:p>
@@ -3493,7 +3493,7 @@
                 <a:ea typeface="Arial" pitchFamily="34" charset="-122"/>
                 <a:cs typeface="Arial" pitchFamily="34" charset="-120"/>
               </a:rPr>
-              <a:t>LAB 2 · 15:45 – 16:45</a:t>
+              <a:t>LAB 2 · 16:15 – 16:45</a:t>
             </a:r>
             <a:endParaRPr lang="en-US" sz="1100" dirty="0"/>
           </a:p>
@@ -7625,7 +7625,7 @@
                 <a:ea typeface="Arial" pitchFamily="34" charset="-122"/>
                 <a:cs typeface="Arial" pitchFamily="34" charset="-120"/>
               </a:rPr>
-              <a:t>LAB 1 · 14:15 – 15:00</a:t>
+              <a:t>LAB 1 · 15:30 – 16:00</a:t>
             </a:r>
             <a:endParaRPr lang="en-US" sz="1100" dirty="0"/>
           </a:p>
@@ -8425,7 +8425,7 @@
                 <a:ea typeface="Arial" pitchFamily="34" charset="-122"/>
                 <a:cs typeface="Arial" pitchFamily="34" charset="-120"/>
               </a:rPr>
-              <a:t>15:00 – 15:15 break; then the 3D part begins.</a:t>
+              <a:t>The 3D part begins at 16:00; Lab 2 at 16:15.</a:t>
             </a:r>
             <a:endParaRPr lang="en-US" sz="1200" dirty="0"/>
           </a:p>
